--- a/暑期實習進度報告/08.12.pptx
+++ b/暑期實習進度報告/08.12.pptx
@@ -643,6 +643,10 @@
           <a:bodyPr/>
           <a:lstStyle/>
           <a:p>
+            <a:r>
+              <a:rPr lang="en-US" altLang="zh-TW" dirty="0"/>
+              <a:t>other ml</a:t>
+            </a:r>
             <a:endParaRPr lang="zh-TW" altLang="en-US" dirty="0"/>
           </a:p>
         </p:txBody>
@@ -1098,6 +1102,26 @@
           <a:bodyPr/>
           <a:lstStyle/>
           <a:p>
+            <a:r>
+              <a:rPr lang="zh-TW" altLang="en-US" dirty="0"/>
+              <a:t>為什麼判斷完的</a:t>
+            </a:r>
+            <a:r>
+              <a:rPr lang="en-US" altLang="zh-TW" dirty="0"/>
+              <a:t>infection</a:t>
+            </a:r>
+            <a:r>
+              <a:rPr lang="zh-TW" altLang="en-US" dirty="0"/>
+              <a:t>比例會那麼高，訓練前後每個</a:t>
+            </a:r>
+            <a:r>
+              <a:rPr lang="en-US" altLang="zh-TW" dirty="0"/>
+              <a:t>cell type</a:t>
+            </a:r>
+            <a:r>
+              <a:rPr lang="zh-TW" altLang="en-US"/>
+              <a:t>在感染上都大幅提升</a:t>
+            </a:r>
             <a:endParaRPr lang="zh-TW" altLang="en-US" dirty="0"/>
           </a:p>
         </p:txBody>
@@ -1206,7 +1230,33 @@
           <a:bodyPr/>
           <a:lstStyle/>
           <a:p>
+            <a:r>
+              <a:rPr lang="en-US" altLang="zh-TW" dirty="0"/>
+              <a:t>Gene </a:t>
+            </a:r>
+            <a:r>
+              <a:rPr lang="zh-TW" altLang="en-US" dirty="0"/>
+              <a:t>沒有變異挑出來</a:t>
+            </a:r>
             <a:endParaRPr lang="en-US" altLang="zh-TW" dirty="0"/>
+          </a:p>
+          <a:p>
+            <a:r>
+              <a:rPr lang="zh-TW" altLang="en-US" dirty="0"/>
+              <a:t>做不同的定義</a:t>
+            </a:r>
+            <a:r>
+              <a:rPr lang="en-US" altLang="zh-TW" dirty="0"/>
+              <a:t>(</a:t>
+            </a:r>
+            <a:r>
+              <a:rPr lang="zh-TW" altLang="en-US" dirty="0"/>
+              <a:t> 看是不是真的不一樣</a:t>
+            </a:r>
+            <a:r>
+              <a:rPr lang="en-US" altLang="zh-TW" dirty="0"/>
+              <a:t>)</a:t>
+            </a:r>
           </a:p>
         </p:txBody>
       </p:sp>
@@ -1314,6 +1364,14 @@
           <a:bodyPr/>
           <a:lstStyle/>
           <a:p>
+            <a:r>
+              <a:rPr lang="en-US" altLang="zh-TW" dirty="0"/>
+              <a:t>Shapley </a:t>
+            </a:r>
+            <a:r>
+              <a:rPr lang="zh-TW" altLang="en-US" dirty="0"/>
+              <a:t>的分布 找斷點</a:t>
+            </a:r>
             <a:endParaRPr lang="en-US" altLang="zh-TW" dirty="0"/>
           </a:p>
         </p:txBody>
@@ -1638,6 +1696,28 @@
           <a:bodyPr/>
           <a:lstStyle/>
           <a:p>
+            <a:r>
+              <a:rPr lang="zh-TW" altLang="en-US" dirty="0"/>
+              <a:t>不一定要參考</a:t>
+            </a:r>
+            <a:r>
+              <a:rPr lang="en-US" altLang="zh-TW" dirty="0"/>
+              <a:t>scale free</a:t>
+            </a:r>
+            <a:r>
+              <a:rPr lang="zh-TW" altLang="en-US" dirty="0"/>
+              <a:t>，可以參考商</a:t>
+            </a:r>
+            <a:endParaRPr lang="en-US" altLang="zh-TW" dirty="0"/>
+          </a:p>
+          <a:p>
+            <a:endParaRPr lang="en-US" altLang="zh-TW" dirty="0"/>
+          </a:p>
+          <a:p>
+            <a:r>
+              <a:rPr lang="zh-TW" altLang="en-US" dirty="0"/>
+              <a:t>用文氏圖去找交集</a:t>
+            </a:r>
             <a:endParaRPr lang="en-US" altLang="zh-TW" dirty="0"/>
           </a:p>
         </p:txBody>
